--- a/examples/recreations/13_Dropbox_Education__Engineering_CareerOverview_SHS_DMCoombs_20210407_r/out_mat2ppt.pptx
+++ b/examples/recreations/13_Dropbox_Education__Engineering_CareerOverview_SHS_DMCoombs_20210407_r/out_mat2ppt.pptx
@@ -3423,6 +3423,45 @@
           </a:p>
         </p:txBody>
       </p:sp>
+      <p:sp>
+        <p:nvSpPr>
+          <p:cNvPr id="3" name="Rectangle 2"/>
+          <p:cNvSpPr/>
+          <p:nvPr/>
+        </p:nvSpPr>
+        <p:spPr>
+          <a:xfrm>
+            <a:off x="838200" y="365125"/>
+            <a:ext cx="10515600" cy="1325563"/>
+          </a:xfrm>
+          <a:prstGeom prst="rect">
+            <a:avLst/>
+          </a:prstGeom>
+        </p:spPr>
+        <p:style>
+          <a:lnRef idx="1">
+            <a:schemeClr val="accent1"/>
+          </a:lnRef>
+          <a:fillRef idx="3">
+            <a:schemeClr val="accent1"/>
+          </a:fillRef>
+          <a:effectRef idx="2">
+            <a:schemeClr val="accent1"/>
+          </a:effectRef>
+          <a:fontRef idx="minor">
+            <a:schemeClr val="lt1"/>
+          </a:fontRef>
+        </p:style>
+        <p:txBody>
+          <a:bodyPr rtlCol="0" anchor="ctr"/>
+          <a:lstStyle/>
+          <a:p>
+            <a:r>
+              <a:t>Personal IntroTypes of EngineeringEducational RequirementsCareer OverviewSucceed in Any CareerQ &amp; ADisclaimer: These are the presenter’s opinions and do not necessarily reflect those of his employers, past and present</a:t>
+            </a:r>
+          </a:p>
+        </p:txBody>
+      </p:sp>
     </p:spTree>
   </p:cSld>
   <p:clrMapOvr>
@@ -3480,6 +3519,45 @@
           </a:p>
         </p:txBody>
       </p:sp>
+      <p:sp>
+        <p:nvSpPr>
+          <p:cNvPr id="3" name="Rectangle 2"/>
+          <p:cNvSpPr/>
+          <p:nvPr/>
+        </p:nvSpPr>
+        <p:spPr>
+          <a:xfrm>
+            <a:off x="838200" y="365125"/>
+            <a:ext cx="10515600" cy="1325563"/>
+          </a:xfrm>
+          <a:prstGeom prst="rect">
+            <a:avLst/>
+          </a:prstGeom>
+        </p:spPr>
+        <p:style>
+          <a:lnRef idx="1">
+            <a:schemeClr val="accent1"/>
+          </a:lnRef>
+          <a:fillRef idx="3">
+            <a:schemeClr val="accent1"/>
+          </a:fillRef>
+          <a:effectRef idx="2">
+            <a:schemeClr val="accent1"/>
+          </a:effectRef>
+          <a:fontRef idx="minor">
+            <a:schemeClr val="lt1"/>
+          </a:fontRef>
+        </p:style>
+        <p:txBody>
+          <a:bodyPr rtlCol="0" anchor="ctr"/>
+          <a:lstStyle/>
+          <a:p>
+            <a:r>
+              <a:t>Name: Douglas CoombsEmployer: Sandia National LaboratoriesTitle: Principal Member of the Technical StaffJob Roles: Audit scientific and engineering work to ensure national securityPerform system analyses to ensure safetyManage software projects to help engineers work more productively Contribute to R&amp;D efforts to advance product linesDid that make any sense?</a:t>
+            </a:r>
+          </a:p>
+        </p:txBody>
+      </p:sp>
     </p:spTree>
   </p:cSld>
   <p:clrMapOvr>
@@ -3498,16 +3576,94 @@
         <p:nvPr/>
       </p:nvGrpSpPr>
       <p:grpSpPr/>
-      <p:sp>
-        <p:nvSpPr>
-          <p:cNvPr id="2" name="Rectangle 1"/>
+      <p:pic>
+        <p:nvPicPr>
+          <p:cNvPr id="2" name="Picture 1" descr="image6.jpg"/>
+          <p:cNvPicPr>
+            <a:picLocks noChangeAspect="1"/>
+          </p:cNvPicPr>
+          <p:nvPr/>
+        </p:nvPicPr>
+        <p:blipFill>
+          <a:blip r:embed="rId2"/>
+          <a:stretch>
+            <a:fillRect/>
+          </a:stretch>
+        </p:blipFill>
+        <p:spPr>
+          <a:xfrm>
+            <a:off x="5105400" y="3048000"/>
+            <a:ext cx="3913259" cy="3133725"/>
+          </a:xfrm>
+          <a:prstGeom prst="rect">
+            <a:avLst/>
+          </a:prstGeom>
+        </p:spPr>
+      </p:pic>
+      <p:pic>
+        <p:nvPicPr>
+          <p:cNvPr id="3" name="Picture 2" descr="image7.jpg"/>
+          <p:cNvPicPr>
+            <a:picLocks noChangeAspect="1"/>
+          </p:cNvPicPr>
+          <p:nvPr/>
+        </p:nvPicPr>
+        <p:blipFill>
+          <a:blip r:embed="rId3"/>
+          <a:stretch>
+            <a:fillRect/>
+          </a:stretch>
+        </p:blipFill>
+        <p:spPr>
+          <a:xfrm>
+            <a:off x="438555" y="3238499"/>
+            <a:ext cx="4422881" cy="2943226"/>
+          </a:xfrm>
+          <a:prstGeom prst="rect">
+            <a:avLst/>
+          </a:prstGeom>
+        </p:spPr>
+      </p:pic>
+      <p:cxnSp>
+        <p:nvCxnSpPr>
+          <p:cNvPr id="4" name="Connector 3"/>
+          <p:cNvCxnSpPr/>
+          <p:nvPr/>
+        </p:nvCxnSpPr>
+        <p:spPr>
+          <a:xfrm>
+            <a:off x="438555" y="3238499"/>
+            <a:ext cx="4422881" cy="2943226"/>
+          </a:xfrm>
+          <a:prstGeom prst="line">
+            <a:avLst/>
+          </a:prstGeom>
+        </p:spPr>
+        <p:style>
+          <a:lnRef idx="2">
+            <a:schemeClr val="accent1"/>
+          </a:lnRef>
+          <a:fillRef idx="0">
+            <a:schemeClr val="accent1"/>
+          </a:fillRef>
+          <a:effectRef idx="1">
+            <a:schemeClr val="accent1"/>
+          </a:effectRef>
+          <a:fontRef idx="minor">
+            <a:schemeClr val="tx1"/>
+          </a:fontRef>
+        </p:style>
+      </p:cxnSp>
+      <p:sp>
+        <p:nvSpPr>
+          <p:cNvPr id="5" name="Rectangle 4"/>
           <p:cNvSpPr/>
           <p:nvPr/>
         </p:nvSpPr>
         <p:spPr>
           <a:xfrm>
-            <a:off x="990600" y="0"/>
-            <a:ext cx="7161213" cy="1084263"/>
+            <a:off x="7814985" y="3429000"/>
+            <a:ext cx="910827" cy="1200329"/>
           </a:xfrm>
           <a:prstGeom prst="rect">
             <a:avLst/>
@@ -3532,11 +3688,764 @@
           <a:lstStyle/>
           <a:p>
             <a:r>
+              <a:t></a:t>
+            </a:r>
+          </a:p>
+        </p:txBody>
+      </p:sp>
+      <p:cxnSp>
+        <p:nvCxnSpPr>
+          <p:cNvPr id="6" name="Connector 5"/>
+          <p:cNvCxnSpPr/>
+          <p:nvPr/>
+        </p:nvCxnSpPr>
+        <p:spPr>
+          <a:xfrm flipV="1">
+            <a:off x="438555" y="3238499"/>
+            <a:ext cx="4422881" cy="2943226"/>
+          </a:xfrm>
+          <a:prstGeom prst="line">
+            <a:avLst/>
+          </a:prstGeom>
+        </p:spPr>
+        <p:style>
+          <a:lnRef idx="2">
+            <a:schemeClr val="accent1"/>
+          </a:lnRef>
+          <a:fillRef idx="0">
+            <a:schemeClr val="accent1"/>
+          </a:fillRef>
+          <a:effectRef idx="1">
+            <a:schemeClr val="accent1"/>
+          </a:effectRef>
+          <a:fontRef idx="minor">
+            <a:schemeClr val="tx1"/>
+          </a:fontRef>
+        </p:style>
+      </p:cxnSp>
+      <p:sp>
+        <p:nvSpPr>
+          <p:cNvPr id="7" name="Rectangle 6"/>
+          <p:cNvSpPr/>
+          <p:nvPr/>
+        </p:nvSpPr>
+        <p:spPr>
+          <a:xfrm>
+            <a:off x="990600" y="0"/>
+            <a:ext cx="7161213" cy="1084263"/>
+          </a:xfrm>
+          <a:prstGeom prst="rect">
+            <a:avLst/>
+          </a:prstGeom>
+        </p:spPr>
+        <p:style>
+          <a:lnRef idx="1">
+            <a:schemeClr val="accent1"/>
+          </a:lnRef>
+          <a:fillRef idx="3">
+            <a:schemeClr val="accent1"/>
+          </a:fillRef>
+          <a:effectRef idx="2">
+            <a:schemeClr val="accent1"/>
+          </a:effectRef>
+          <a:fontRef idx="minor">
+            <a:schemeClr val="lt1"/>
+          </a:fontRef>
+        </p:style>
+        <p:txBody>
+          <a:bodyPr rtlCol="0" anchor="ctr"/>
+          <a:lstStyle/>
+          <a:p>
+            <a:r>
               <a:t>Types of Engineering</a:t>
             </a:r>
           </a:p>
         </p:txBody>
       </p:sp>
+      <p:sp>
+        <p:nvSpPr>
+          <p:cNvPr id="8" name="Rectangle 7"/>
+          <p:cNvSpPr/>
+          <p:nvPr/>
+        </p:nvSpPr>
+        <p:spPr>
+          <a:xfrm>
+            <a:off x="838200" y="365125"/>
+            <a:ext cx="10515600" cy="1325563"/>
+          </a:xfrm>
+          <a:prstGeom prst="rect">
+            <a:avLst/>
+          </a:prstGeom>
+        </p:spPr>
+        <p:style>
+          <a:lnRef idx="1">
+            <a:schemeClr val="accent1"/>
+          </a:lnRef>
+          <a:fillRef idx="3">
+            <a:schemeClr val="accent1"/>
+          </a:fillRef>
+          <a:effectRef idx="2">
+            <a:schemeClr val="accent1"/>
+          </a:effectRef>
+          <a:fontRef idx="minor">
+            <a:schemeClr val="lt1"/>
+          </a:fontRef>
+        </p:style>
+        <p:txBody>
+          <a:bodyPr rtlCol="0" anchor="ctr"/>
+          <a:lstStyle/>
+          <a:p>
+            <a:r>
+              <a:t>What do engineers do? We solve scientific and technical problems to create the infrastructure and products that enable modern lifeTrain engineers vs. technical engineers Types of EngineersCivil, Mechanical, and Electrical (most engineers) Niche fieldsChemical, Bio-Medical, Materials, Industrial, Aerospace, Mining, Petroleum, Nuclear, Marine, Agricultural, EnvironmentalWide range of pay depending on industry, difficulty and educational level attained ($50k-$250k, median ~85k)Commodities vs cutting edge technologiesScalability of productGood bread and butter job to support a family withMost people can do it if they work hard enough – not like sports or acting where only the top .01% succeed and make enough money to support a family</a:t>
+            </a:r>
+          </a:p>
+        </p:txBody>
+      </p:sp>
+      <p:pic>
+        <p:nvPicPr>
+          <p:cNvPr id="9" name="Picture 8" descr="image8.jpg"/>
+          <p:cNvPicPr>
+            <a:picLocks noChangeAspect="1"/>
+          </p:cNvPicPr>
+          <p:nvPr/>
+        </p:nvPicPr>
+        <p:blipFill>
+          <a:blip r:embed="rId4"/>
+          <a:stretch>
+            <a:fillRect/>
+          </a:stretch>
+        </p:blipFill>
+        <p:spPr>
+          <a:xfrm>
+            <a:off x="304800" y="4704242"/>
+            <a:ext cx="3549200" cy="1994200"/>
+          </a:xfrm>
+          <a:prstGeom prst="rect">
+            <a:avLst/>
+          </a:prstGeom>
+        </p:spPr>
+      </p:pic>
+      <p:pic>
+        <p:nvPicPr>
+          <p:cNvPr id="10" name="Picture 9" descr="image9.png"/>
+          <p:cNvPicPr>
+            <a:picLocks noChangeAspect="1"/>
+          </p:cNvPicPr>
+          <p:nvPr/>
+        </p:nvPicPr>
+        <p:blipFill>
+          <a:blip r:embed="rId5"/>
+          <a:stretch>
+            <a:fillRect/>
+          </a:stretch>
+        </p:blipFill>
+        <p:spPr>
+          <a:xfrm>
+            <a:off x="3949925" y="4770408"/>
+            <a:ext cx="2908075" cy="1935192"/>
+          </a:xfrm>
+          <a:prstGeom prst="rect">
+            <a:avLst/>
+          </a:prstGeom>
+        </p:spPr>
+      </p:pic>
+      <p:pic>
+        <p:nvPicPr>
+          <p:cNvPr id="11" name="Picture 10" descr="image10.png"/>
+          <p:cNvPicPr>
+            <a:picLocks noChangeAspect="1"/>
+          </p:cNvPicPr>
+          <p:nvPr/>
+        </p:nvPicPr>
+        <p:blipFill>
+          <a:blip r:embed="rId6"/>
+          <a:stretch>
+            <a:fillRect/>
+          </a:stretch>
+        </p:blipFill>
+        <p:spPr>
+          <a:xfrm>
+            <a:off x="304800" y="2743200"/>
+            <a:ext cx="3429000" cy="1920240"/>
+          </a:xfrm>
+          <a:prstGeom prst="rect">
+            <a:avLst/>
+          </a:prstGeom>
+        </p:spPr>
+      </p:pic>
+      <p:pic>
+        <p:nvPicPr>
+          <p:cNvPr id="12" name="Picture 11" descr="image11.png"/>
+          <p:cNvPicPr>
+            <a:picLocks noChangeAspect="1"/>
+          </p:cNvPicPr>
+          <p:nvPr/>
+        </p:nvPicPr>
+        <p:blipFill>
+          <a:blip r:embed="rId7"/>
+          <a:stretch>
+            <a:fillRect/>
+          </a:stretch>
+        </p:blipFill>
+        <p:spPr>
+          <a:xfrm>
+            <a:off x="3783408" y="2780742"/>
+            <a:ext cx="3253588" cy="1845156"/>
+          </a:xfrm>
+          <a:prstGeom prst="rect">
+            <a:avLst/>
+          </a:prstGeom>
+        </p:spPr>
+      </p:pic>
+      <p:sp>
+        <p:nvSpPr>
+          <p:cNvPr id="13" name="Rectangle 12"/>
+          <p:cNvSpPr/>
+          <p:nvPr/>
+        </p:nvSpPr>
+        <p:spPr>
+          <a:xfrm>
+            <a:off x="522926" y="3510110"/>
+            <a:ext cx="1823258" cy="2998037"/>
+          </a:xfrm>
+          <a:prstGeom prst="rect">
+            <a:avLst/>
+          </a:prstGeom>
+        </p:spPr>
+        <p:style>
+          <a:lnRef idx="1">
+            <a:schemeClr val="accent1"/>
+          </a:lnRef>
+          <a:fillRef idx="3">
+            <a:schemeClr val="accent1"/>
+          </a:fillRef>
+          <a:effectRef idx="2">
+            <a:schemeClr val="accent1"/>
+          </a:effectRef>
+          <a:fontRef idx="minor">
+            <a:schemeClr val="lt1"/>
+          </a:fontRef>
+        </p:style>
+        <p:txBody>
+          <a:bodyPr rtlCol="0" anchor="ctr"/>
+          <a:lstStyle/>
+          <a:p>
+            <a:r>
+              <a:t>Civil Engineering Bridges, Roads,  Dams, Skyscrapers, Sewage Treatment</a:t>
+            </a:r>
+          </a:p>
+        </p:txBody>
+      </p:sp>
+      <p:pic>
+        <p:nvPicPr>
+          <p:cNvPr id="14" name="Picture 13" descr="image12.png"/>
+          <p:cNvPicPr>
+            <a:picLocks noChangeAspect="1"/>
+          </p:cNvPicPr>
+          <p:nvPr/>
+        </p:nvPicPr>
+        <p:blipFill>
+          <a:blip r:embed="rId8"/>
+          <a:stretch>
+            <a:fillRect/>
+          </a:stretch>
+        </p:blipFill>
+        <p:spPr>
+          <a:xfrm>
+            <a:off x="2314456" y="5109989"/>
+            <a:ext cx="1990754" cy="1491144"/>
+          </a:xfrm>
+          <a:prstGeom prst="rect">
+            <a:avLst/>
+          </a:prstGeom>
+        </p:spPr>
+      </p:pic>
+      <p:pic>
+        <p:nvPicPr>
+          <p:cNvPr id="15" name="Picture 14" descr="image13.png"/>
+          <p:cNvPicPr>
+            <a:picLocks noChangeAspect="1"/>
+          </p:cNvPicPr>
+          <p:nvPr/>
+        </p:nvPicPr>
+        <p:blipFill>
+          <a:blip r:embed="rId9"/>
+          <a:stretch>
+            <a:fillRect/>
+          </a:stretch>
+        </p:blipFill>
+        <p:spPr>
+          <a:xfrm>
+            <a:off x="4473946" y="5230477"/>
+            <a:ext cx="2006193" cy="1335030"/>
+          </a:xfrm>
+          <a:prstGeom prst="rect">
+            <a:avLst/>
+          </a:prstGeom>
+        </p:spPr>
+      </p:pic>
+      <p:pic>
+        <p:nvPicPr>
+          <p:cNvPr id="16" name="Picture 15" descr="image14.png"/>
+          <p:cNvPicPr>
+            <a:picLocks noChangeAspect="1"/>
+          </p:cNvPicPr>
+          <p:nvPr/>
+        </p:nvPicPr>
+        <p:blipFill>
+          <a:blip r:embed="rId10"/>
+          <a:stretch>
+            <a:fillRect/>
+          </a:stretch>
+        </p:blipFill>
+        <p:spPr>
+          <a:xfrm>
+            <a:off x="6575878" y="5203544"/>
+            <a:ext cx="2376034" cy="1335029"/>
+          </a:xfrm>
+          <a:prstGeom prst="rect">
+            <a:avLst/>
+          </a:prstGeom>
+        </p:spPr>
+      </p:pic>
+      <p:pic>
+        <p:nvPicPr>
+          <p:cNvPr id="17" name="Picture 16" descr="image15.png"/>
+          <p:cNvPicPr>
+            <a:picLocks noChangeAspect="1"/>
+          </p:cNvPicPr>
+          <p:nvPr/>
+        </p:nvPicPr>
+        <p:blipFill>
+          <a:blip r:embed="rId11"/>
+          <a:stretch>
+            <a:fillRect/>
+          </a:stretch>
+        </p:blipFill>
+        <p:spPr>
+          <a:xfrm>
+            <a:off x="2287454" y="3714393"/>
+            <a:ext cx="2044757" cy="1302532"/>
+          </a:xfrm>
+          <a:prstGeom prst="rect">
+            <a:avLst/>
+          </a:prstGeom>
+        </p:spPr>
+      </p:pic>
+      <p:pic>
+        <p:nvPicPr>
+          <p:cNvPr id="18" name="Picture 17" descr="image16.png"/>
+          <p:cNvPicPr>
+            <a:picLocks noChangeAspect="1"/>
+          </p:cNvPicPr>
+          <p:nvPr/>
+        </p:nvPicPr>
+        <p:blipFill>
+          <a:blip r:embed="rId12"/>
+          <a:stretch>
+            <a:fillRect/>
+          </a:stretch>
+        </p:blipFill>
+        <p:spPr>
+          <a:xfrm>
+            <a:off x="4415662" y="3739275"/>
+            <a:ext cx="2176462" cy="1277650"/>
+          </a:xfrm>
+          <a:prstGeom prst="rect">
+            <a:avLst/>
+          </a:prstGeom>
+        </p:spPr>
+      </p:pic>
+      <p:pic>
+        <p:nvPicPr>
+          <p:cNvPr id="19" name="Picture 18" descr="image17.png"/>
+          <p:cNvPicPr>
+            <a:picLocks noChangeAspect="1"/>
+          </p:cNvPicPr>
+          <p:nvPr/>
+        </p:nvPicPr>
+        <p:blipFill>
+          <a:blip r:embed="rId13"/>
+          <a:stretch>
+            <a:fillRect/>
+          </a:stretch>
+        </p:blipFill>
+        <p:spPr>
+          <a:xfrm>
+            <a:off x="6563326" y="3646211"/>
+            <a:ext cx="1327324" cy="1463778"/>
+          </a:xfrm>
+          <a:prstGeom prst="rect">
+            <a:avLst/>
+          </a:prstGeom>
+        </p:spPr>
+      </p:pic>
+      <p:pic>
+        <p:nvPicPr>
+          <p:cNvPr id="20" name="Picture 19" descr="image18.png"/>
+          <p:cNvPicPr>
+            <a:picLocks noChangeAspect="1"/>
+          </p:cNvPicPr>
+          <p:nvPr/>
+        </p:nvPicPr>
+        <p:blipFill>
+          <a:blip r:embed="rId14"/>
+          <a:stretch>
+            <a:fillRect/>
+          </a:stretch>
+        </p:blipFill>
+        <p:spPr>
+          <a:xfrm>
+            <a:off x="7657128" y="3733800"/>
+            <a:ext cx="1376189" cy="1376189"/>
+          </a:xfrm>
+          <a:prstGeom prst="rect">
+            <a:avLst/>
+          </a:prstGeom>
+        </p:spPr>
+      </p:pic>
+      <p:sp>
+        <p:nvSpPr>
+          <p:cNvPr id="21" name="Rectangle 20"/>
+          <p:cNvSpPr/>
+          <p:nvPr/>
+        </p:nvSpPr>
+        <p:spPr>
+          <a:xfrm>
+            <a:off x="185331" y="3695590"/>
+            <a:ext cx="2044757" cy="3170099"/>
+          </a:xfrm>
+          <a:prstGeom prst="rect">
+            <a:avLst/>
+          </a:prstGeom>
+        </p:spPr>
+        <p:style>
+          <a:lnRef idx="1">
+            <a:schemeClr val="accent1"/>
+          </a:lnRef>
+          <a:fillRef idx="3">
+            <a:schemeClr val="accent1"/>
+          </a:fillRef>
+          <a:effectRef idx="2">
+            <a:schemeClr val="accent1"/>
+          </a:effectRef>
+          <a:fontRef idx="minor">
+            <a:schemeClr val="lt1"/>
+          </a:fontRef>
+        </p:style>
+        <p:txBody>
+          <a:bodyPr rtlCol="0" anchor="ctr"/>
+          <a:lstStyle/>
+          <a:p>
+            <a:r>
+              <a:t>Mechanical Engineering Rockets, Trucks, Cars, Household Appliances, Airplanes, Machines in General</a:t>
+            </a:r>
+          </a:p>
+        </p:txBody>
+      </p:sp>
+      <p:sp>
+        <p:nvSpPr>
+          <p:cNvPr id="22" name="Rectangle 21"/>
+          <p:cNvSpPr/>
+          <p:nvPr/>
+        </p:nvSpPr>
+        <p:spPr>
+          <a:xfrm>
+            <a:off x="310712" y="3457699"/>
+            <a:ext cx="2176869" cy="2862322"/>
+          </a:xfrm>
+          <a:prstGeom prst="rect">
+            <a:avLst/>
+          </a:prstGeom>
+        </p:spPr>
+        <p:style>
+          <a:lnRef idx="1">
+            <a:schemeClr val="accent1"/>
+          </a:lnRef>
+          <a:fillRef idx="3">
+            <a:schemeClr val="accent1"/>
+          </a:fillRef>
+          <a:effectRef idx="2">
+            <a:schemeClr val="accent1"/>
+          </a:effectRef>
+          <a:fontRef idx="minor">
+            <a:schemeClr val="lt1"/>
+          </a:fontRef>
+        </p:style>
+        <p:txBody>
+          <a:bodyPr rtlCol="0" anchor="ctr"/>
+          <a:lstStyle/>
+          <a:p>
+            <a:r>
+              <a:t>Electrical Engineering Computers, Phones, Communication Infrastructure, General Electronics</a:t>
+            </a:r>
+          </a:p>
+        </p:txBody>
+      </p:sp>
+      <p:pic>
+        <p:nvPicPr>
+          <p:cNvPr id="23" name="Picture 22" descr="image19.jpg"/>
+          <p:cNvPicPr>
+            <a:picLocks noChangeAspect="1"/>
+          </p:cNvPicPr>
+          <p:nvPr/>
+        </p:nvPicPr>
+        <p:blipFill>
+          <a:blip r:embed="rId15"/>
+          <a:stretch>
+            <a:fillRect/>
+          </a:stretch>
+        </p:blipFill>
+        <p:spPr>
+          <a:xfrm>
+            <a:off x="6504380" y="4974083"/>
+            <a:ext cx="2443760" cy="1531652"/>
+          </a:xfrm>
+          <a:prstGeom prst="rect">
+            <a:avLst/>
+          </a:prstGeom>
+        </p:spPr>
+      </p:pic>
+      <p:pic>
+        <p:nvPicPr>
+          <p:cNvPr id="24" name="Picture 23" descr="image20.png"/>
+          <p:cNvPicPr>
+            <a:picLocks noChangeAspect="1"/>
+          </p:cNvPicPr>
+          <p:nvPr/>
+        </p:nvPicPr>
+        <p:blipFill>
+          <a:blip r:embed="rId16"/>
+          <a:stretch>
+            <a:fillRect/>
+          </a:stretch>
+        </p:blipFill>
+        <p:spPr>
+          <a:xfrm>
+            <a:off x="6369731" y="3231008"/>
+            <a:ext cx="2619375" cy="1743075"/>
+          </a:xfrm>
+          <a:prstGeom prst="rect">
+            <a:avLst/>
+          </a:prstGeom>
+        </p:spPr>
+      </p:pic>
+      <p:pic>
+        <p:nvPicPr>
+          <p:cNvPr id="25" name="Picture 24" descr="image21.jpg"/>
+          <p:cNvPicPr>
+            <a:picLocks noChangeAspect="1"/>
+          </p:cNvPicPr>
+          <p:nvPr/>
+        </p:nvPicPr>
+        <p:blipFill>
+          <a:blip r:embed="rId17"/>
+          <a:stretch>
+            <a:fillRect/>
+          </a:stretch>
+        </p:blipFill>
+        <p:spPr>
+          <a:xfrm>
+            <a:off x="2537815" y="5096683"/>
+            <a:ext cx="1283907" cy="1398032"/>
+          </a:xfrm>
+          <a:prstGeom prst="rect">
+            <a:avLst/>
+          </a:prstGeom>
+        </p:spPr>
+      </p:pic>
+      <p:pic>
+        <p:nvPicPr>
+          <p:cNvPr id="26" name="Picture 25" descr="image22.png"/>
+          <p:cNvPicPr>
+            <a:picLocks noChangeAspect="1"/>
+          </p:cNvPicPr>
+          <p:nvPr/>
+        </p:nvPicPr>
+        <p:blipFill>
+          <a:blip r:embed="rId18"/>
+          <a:stretch>
+            <a:fillRect/>
+          </a:stretch>
+        </p:blipFill>
+        <p:spPr>
+          <a:xfrm>
+            <a:off x="2890684" y="3263665"/>
+            <a:ext cx="3252941" cy="1710418"/>
+          </a:xfrm>
+          <a:prstGeom prst="rect">
+            <a:avLst/>
+          </a:prstGeom>
+        </p:spPr>
+      </p:pic>
+      <p:pic>
+        <p:nvPicPr>
+          <p:cNvPr id="27" name="Picture 26" descr="image23.jpg"/>
+          <p:cNvPicPr>
+            <a:picLocks noChangeAspect="1"/>
+          </p:cNvPicPr>
+          <p:nvPr/>
+        </p:nvPicPr>
+        <p:blipFill>
+          <a:blip r:embed="rId19"/>
+          <a:stretch>
+            <a:fillRect/>
+          </a:stretch>
+        </p:blipFill>
+        <p:spPr>
+          <a:xfrm>
+            <a:off x="3863757" y="5096683"/>
+            <a:ext cx="2590389" cy="1491442"/>
+          </a:xfrm>
+          <a:prstGeom prst="rect">
+            <a:avLst/>
+          </a:prstGeom>
+        </p:spPr>
+      </p:pic>
+      <p:pic>
+        <p:nvPicPr>
+          <p:cNvPr id="28" name="Picture 27" descr="image24.jpg"/>
+          <p:cNvPicPr>
+            <a:picLocks noChangeAspect="1"/>
+          </p:cNvPicPr>
+          <p:nvPr/>
+        </p:nvPicPr>
+        <p:blipFill>
+          <a:blip r:embed="rId20"/>
+          <a:stretch>
+            <a:fillRect/>
+          </a:stretch>
+        </p:blipFill>
+        <p:spPr>
+          <a:xfrm>
+            <a:off x="6881338" y="5105400"/>
+            <a:ext cx="1943100" cy="1600200"/>
+          </a:xfrm>
+          <a:prstGeom prst="rect">
+            <a:avLst/>
+          </a:prstGeom>
+        </p:spPr>
+      </p:pic>
+      <p:pic>
+        <p:nvPicPr>
+          <p:cNvPr id="29" name="Picture 28" descr="image25.jpg"/>
+          <p:cNvPicPr>
+            <a:picLocks noChangeAspect="1"/>
+          </p:cNvPicPr>
+          <p:nvPr/>
+        </p:nvPicPr>
+        <p:blipFill>
+          <a:blip r:embed="rId21"/>
+          <a:stretch>
+            <a:fillRect/>
+          </a:stretch>
+        </p:blipFill>
+        <p:spPr>
+          <a:xfrm>
+            <a:off x="6492400" y="3402339"/>
+            <a:ext cx="2619375" cy="1743075"/>
+          </a:xfrm>
+          <a:prstGeom prst="rect">
+            <a:avLst/>
+          </a:prstGeom>
+        </p:spPr>
+      </p:pic>
+      <p:pic>
+        <p:nvPicPr>
+          <p:cNvPr id="30" name="Picture 29" descr="image26.jpg"/>
+          <p:cNvPicPr>
+            <a:picLocks noChangeAspect="1"/>
+          </p:cNvPicPr>
+          <p:nvPr/>
+        </p:nvPicPr>
+        <p:blipFill>
+          <a:blip r:embed="rId22"/>
+          <a:stretch>
+            <a:fillRect/>
+          </a:stretch>
+        </p:blipFill>
+        <p:spPr>
+          <a:xfrm>
+            <a:off x="2895600" y="3414214"/>
+            <a:ext cx="3596800" cy="1479826"/>
+          </a:xfrm>
+          <a:prstGeom prst="rect">
+            <a:avLst/>
+          </a:prstGeom>
+        </p:spPr>
+      </p:pic>
+      <p:pic>
+        <p:nvPicPr>
+          <p:cNvPr id="31" name="Picture 30" descr="image27.png"/>
+          <p:cNvPicPr>
+            <a:picLocks noChangeAspect="1"/>
+          </p:cNvPicPr>
+          <p:nvPr/>
+        </p:nvPicPr>
+        <p:blipFill>
+          <a:blip r:embed="rId23"/>
+          <a:stretch>
+            <a:fillRect/>
+          </a:stretch>
+        </p:blipFill>
+        <p:spPr>
+          <a:xfrm>
+            <a:off x="3261518" y="4962525"/>
+            <a:ext cx="2619375" cy="1743075"/>
+          </a:xfrm>
+          <a:prstGeom prst="rect">
+            <a:avLst/>
+          </a:prstGeom>
+        </p:spPr>
+      </p:pic>
+      <p:pic>
+        <p:nvPicPr>
+          <p:cNvPr id="32" name="Picture 31" descr="image28.png"/>
+          <p:cNvPicPr>
+            <a:picLocks noChangeAspect="1"/>
+          </p:cNvPicPr>
+          <p:nvPr/>
+        </p:nvPicPr>
+        <p:blipFill>
+          <a:blip r:embed="rId24"/>
+          <a:stretch>
+            <a:fillRect/>
+          </a:stretch>
+        </p:blipFill>
+        <p:spPr>
+          <a:xfrm>
+            <a:off x="276225" y="4905915"/>
+            <a:ext cx="2619375" cy="1743075"/>
+          </a:xfrm>
+          <a:prstGeom prst="rect">
+            <a:avLst/>
+          </a:prstGeom>
+        </p:spPr>
+      </p:pic>
+      <p:pic>
+        <p:nvPicPr>
+          <p:cNvPr id="33" name="Picture 32" descr="image29.png"/>
+          <p:cNvPicPr>
+            <a:picLocks noChangeAspect="1"/>
+          </p:cNvPicPr>
+          <p:nvPr/>
+        </p:nvPicPr>
+        <p:blipFill>
+          <a:blip r:embed="rId25"/>
+          <a:stretch>
+            <a:fillRect/>
+          </a:stretch>
+        </p:blipFill>
+        <p:spPr>
+          <a:xfrm>
+            <a:off x="352424" y="3429000"/>
+            <a:ext cx="2466975" cy="1721362"/>
+          </a:xfrm>
+          <a:prstGeom prst="rect">
+            <a:avLst/>
+          </a:prstGeom>
+        </p:spPr>
+      </p:pic>
     </p:spTree>
   </p:cSld>
   <p:clrMapOvr>
@@ -4059,6 +4968,366 @@
           </a:p>
         </p:txBody>
       </p:sp>
+      <p:pic>
+        <p:nvPicPr>
+          <p:cNvPr id="4" name="Picture 3" descr="image32.jpeg"/>
+          <p:cNvPicPr>
+            <a:picLocks noChangeAspect="1"/>
+          </p:cNvPicPr>
+          <p:nvPr/>
+        </p:nvPicPr>
+        <p:blipFill>
+          <a:blip r:embed="rId2"/>
+          <a:stretch>
+            <a:fillRect/>
+          </a:stretch>
+        </p:blipFill>
+        <p:spPr>
+          <a:xfrm>
+            <a:off x="534411" y="2470587"/>
+            <a:ext cx="3349972" cy="2205740"/>
+          </a:xfrm>
+          <a:prstGeom prst="rect">
+            <a:avLst/>
+          </a:prstGeom>
+        </p:spPr>
+      </p:pic>
+      <p:pic>
+        <p:nvPicPr>
+          <p:cNvPr id="5" name="Picture 4" descr="image33.jpg"/>
+          <p:cNvPicPr>
+            <a:picLocks noChangeAspect="1"/>
+          </p:cNvPicPr>
+          <p:nvPr/>
+        </p:nvPicPr>
+        <p:blipFill>
+          <a:blip r:embed="rId3"/>
+          <a:stretch>
+            <a:fillRect/>
+          </a:stretch>
+        </p:blipFill>
+        <p:spPr>
+          <a:xfrm>
+            <a:off x="3856997" y="4473480"/>
+            <a:ext cx="4144004" cy="2231599"/>
+          </a:xfrm>
+          <a:prstGeom prst="rect">
+            <a:avLst/>
+          </a:prstGeom>
+        </p:spPr>
+      </p:pic>
+      <p:pic>
+        <p:nvPicPr>
+          <p:cNvPr id="6" name="Picture 5" descr="image34.jpg"/>
+          <p:cNvPicPr>
+            <a:picLocks noChangeAspect="1"/>
+          </p:cNvPicPr>
+          <p:nvPr/>
+        </p:nvPicPr>
+        <p:blipFill>
+          <a:blip r:embed="rId4"/>
+          <a:stretch>
+            <a:fillRect/>
+          </a:stretch>
+        </p:blipFill>
+        <p:spPr>
+          <a:xfrm>
+            <a:off x="3851058" y="2168967"/>
+            <a:ext cx="4149943" cy="2323968"/>
+          </a:xfrm>
+          <a:prstGeom prst="rect">
+            <a:avLst/>
+          </a:prstGeom>
+        </p:spPr>
+      </p:pic>
+      <p:pic>
+        <p:nvPicPr>
+          <p:cNvPr id="7" name="Picture 6" descr="image35.jpg"/>
+          <p:cNvPicPr>
+            <a:picLocks noChangeAspect="1"/>
+          </p:cNvPicPr>
+          <p:nvPr/>
+        </p:nvPicPr>
+        <p:blipFill>
+          <a:blip r:embed="rId5"/>
+          <a:stretch>
+            <a:fillRect/>
+          </a:stretch>
+        </p:blipFill>
+        <p:spPr>
+          <a:xfrm>
+            <a:off x="534411" y="4676328"/>
+            <a:ext cx="3338745" cy="2028751"/>
+          </a:xfrm>
+          <a:prstGeom prst="rect">
+            <a:avLst/>
+          </a:prstGeom>
+        </p:spPr>
+      </p:pic>
+      <p:pic>
+        <p:nvPicPr>
+          <p:cNvPr id="8" name="Picture 7" descr="image36.jpg"/>
+          <p:cNvPicPr>
+            <a:picLocks noChangeAspect="1"/>
+          </p:cNvPicPr>
+          <p:nvPr/>
+        </p:nvPicPr>
+        <p:blipFill>
+          <a:blip r:embed="rId6"/>
+          <a:stretch>
+            <a:fillRect/>
+          </a:stretch>
+        </p:blipFill>
+        <p:spPr>
+          <a:xfrm>
+            <a:off x="113077" y="2799760"/>
+            <a:ext cx="5393779" cy="3820085"/>
+          </a:xfrm>
+          <a:prstGeom prst="rect">
+            <a:avLst/>
+          </a:prstGeom>
+        </p:spPr>
+      </p:pic>
+      <p:pic>
+        <p:nvPicPr>
+          <p:cNvPr id="9" name="Picture 8" descr="image37.jpg"/>
+          <p:cNvPicPr>
+            <a:picLocks noChangeAspect="1"/>
+          </p:cNvPicPr>
+          <p:nvPr/>
+        </p:nvPicPr>
+        <p:blipFill>
+          <a:blip r:embed="rId7"/>
+          <a:stretch>
+            <a:fillRect/>
+          </a:stretch>
+        </p:blipFill>
+        <p:spPr>
+          <a:xfrm>
+            <a:off x="5490880" y="4492935"/>
+            <a:ext cx="3106720" cy="2067381"/>
+          </a:xfrm>
+          <a:prstGeom prst="rect">
+            <a:avLst/>
+          </a:prstGeom>
+        </p:spPr>
+      </p:pic>
+      <p:pic>
+        <p:nvPicPr>
+          <p:cNvPr id="10" name="Picture 9" descr="image38.jpg"/>
+          <p:cNvPicPr>
+            <a:picLocks noChangeAspect="1"/>
+          </p:cNvPicPr>
+          <p:nvPr/>
+        </p:nvPicPr>
+        <p:blipFill>
+          <a:blip r:embed="rId8"/>
+          <a:stretch>
+            <a:fillRect/>
+          </a:stretch>
+        </p:blipFill>
+        <p:spPr>
+          <a:xfrm>
+            <a:off x="5490880" y="1359983"/>
+            <a:ext cx="3132952" cy="3132952"/>
+          </a:xfrm>
+          <a:prstGeom prst="rect">
+            <a:avLst/>
+          </a:prstGeom>
+        </p:spPr>
+      </p:pic>
+      <p:pic>
+        <p:nvPicPr>
+          <p:cNvPr id="11" name="Picture 10" descr="image39.jpg"/>
+          <p:cNvPicPr>
+            <a:picLocks noChangeAspect="1"/>
+          </p:cNvPicPr>
+          <p:nvPr/>
+        </p:nvPicPr>
+        <p:blipFill>
+          <a:blip r:embed="rId9"/>
+          <a:stretch>
+            <a:fillRect/>
+          </a:stretch>
+        </p:blipFill>
+        <p:spPr>
+          <a:xfrm>
+            <a:off x="4541955" y="3642110"/>
+            <a:ext cx="4437878" cy="2991097"/>
+          </a:xfrm>
+          <a:prstGeom prst="rect">
+            <a:avLst/>
+          </a:prstGeom>
+        </p:spPr>
+      </p:pic>
+      <p:pic>
+        <p:nvPicPr>
+          <p:cNvPr id="12" name="Picture 11" descr="image40.jpg"/>
+          <p:cNvPicPr>
+            <a:picLocks noChangeAspect="1"/>
+          </p:cNvPicPr>
+          <p:nvPr/>
+        </p:nvPicPr>
+        <p:blipFill>
+          <a:blip r:embed="rId10"/>
+          <a:stretch>
+            <a:fillRect/>
+          </a:stretch>
+        </p:blipFill>
+        <p:spPr>
+          <a:xfrm>
+            <a:off x="105215" y="3647875"/>
+            <a:ext cx="4444832" cy="2957834"/>
+          </a:xfrm>
+          <a:prstGeom prst="rect">
+            <a:avLst/>
+          </a:prstGeom>
+        </p:spPr>
+      </p:pic>
+      <p:pic>
+        <p:nvPicPr>
+          <p:cNvPr id="13" name="Picture 12" descr="image41.jpg"/>
+          <p:cNvPicPr>
+            <a:picLocks noChangeAspect="1"/>
+          </p:cNvPicPr>
+          <p:nvPr/>
+        </p:nvPicPr>
+        <p:blipFill>
+          <a:blip r:embed="rId11"/>
+          <a:stretch>
+            <a:fillRect/>
+          </a:stretch>
+        </p:blipFill>
+        <p:spPr>
+          <a:xfrm>
+            <a:off x="3122621" y="5110357"/>
+            <a:ext cx="2857500" cy="1600200"/>
+          </a:xfrm>
+          <a:prstGeom prst="rect">
+            <a:avLst/>
+          </a:prstGeom>
+        </p:spPr>
+      </p:pic>
+      <p:pic>
+        <p:nvPicPr>
+          <p:cNvPr id="14" name="Picture 13" descr="image42.jpg"/>
+          <p:cNvPicPr>
+            <a:picLocks noChangeAspect="1"/>
+          </p:cNvPicPr>
+          <p:nvPr/>
+        </p:nvPicPr>
+        <p:blipFill>
+          <a:blip r:embed="rId12"/>
+          <a:stretch>
+            <a:fillRect/>
+          </a:stretch>
+        </p:blipFill>
+        <p:spPr>
+          <a:xfrm>
+            <a:off x="6264983" y="3009320"/>
+            <a:ext cx="2143125" cy="2143125"/>
+          </a:xfrm>
+          <a:prstGeom prst="rect">
+            <a:avLst/>
+          </a:prstGeom>
+        </p:spPr>
+      </p:pic>
+      <p:pic>
+        <p:nvPicPr>
+          <p:cNvPr id="15" name="Picture 14" descr="image43.jpg"/>
+          <p:cNvPicPr>
+            <a:picLocks noChangeAspect="1"/>
+          </p:cNvPicPr>
+          <p:nvPr/>
+        </p:nvPicPr>
+        <p:blipFill>
+          <a:blip r:embed="rId13"/>
+          <a:stretch>
+            <a:fillRect/>
+          </a:stretch>
+        </p:blipFill>
+        <p:spPr>
+          <a:xfrm>
+            <a:off x="267965" y="5110357"/>
+            <a:ext cx="2857500" cy="1600200"/>
+          </a:xfrm>
+          <a:prstGeom prst="rect">
+            <a:avLst/>
+          </a:prstGeom>
+        </p:spPr>
+      </p:pic>
+      <p:pic>
+        <p:nvPicPr>
+          <p:cNvPr id="16" name="Picture 15" descr="image44.jpg"/>
+          <p:cNvPicPr>
+            <a:picLocks noChangeAspect="1"/>
+          </p:cNvPicPr>
+          <p:nvPr/>
+        </p:nvPicPr>
+        <p:blipFill>
+          <a:blip r:embed="rId14"/>
+          <a:stretch>
+            <a:fillRect/>
+          </a:stretch>
+        </p:blipFill>
+        <p:spPr>
+          <a:xfrm>
+            <a:off x="5941276" y="5110356"/>
+            <a:ext cx="2400189" cy="1597217"/>
+          </a:xfrm>
+          <a:prstGeom prst="rect">
+            <a:avLst/>
+          </a:prstGeom>
+        </p:spPr>
+      </p:pic>
+      <p:pic>
+        <p:nvPicPr>
+          <p:cNvPr id="17" name="Picture 16" descr="image45.jpg"/>
+          <p:cNvPicPr>
+            <a:picLocks noChangeAspect="1"/>
+          </p:cNvPicPr>
+          <p:nvPr/>
+        </p:nvPicPr>
+        <p:blipFill>
+          <a:blip r:embed="rId15"/>
+          <a:stretch>
+            <a:fillRect/>
+          </a:stretch>
+        </p:blipFill>
+        <p:spPr>
+          <a:xfrm>
+            <a:off x="3099672" y="3510157"/>
+            <a:ext cx="3190334" cy="1600199"/>
+          </a:xfrm>
+          <a:prstGeom prst="rect">
+            <a:avLst/>
+          </a:prstGeom>
+        </p:spPr>
+      </p:pic>
+      <p:pic>
+        <p:nvPicPr>
+          <p:cNvPr id="18" name="Picture 17" descr="image46.jpg"/>
+          <p:cNvPicPr>
+            <a:picLocks noChangeAspect="1"/>
+          </p:cNvPicPr>
+          <p:nvPr/>
+        </p:nvPicPr>
+        <p:blipFill>
+          <a:blip r:embed="rId16"/>
+          <a:stretch>
+            <a:fillRect/>
+          </a:stretch>
+        </p:blipFill>
+        <p:spPr>
+          <a:xfrm>
+            <a:off x="263573" y="3510157"/>
+            <a:ext cx="2847975" cy="1600200"/>
+          </a:xfrm>
+          <a:prstGeom prst="rect">
+            <a:avLst/>
+          </a:prstGeom>
+        </p:spPr>
+      </p:pic>
     </p:spTree>
   </p:cSld>
   <p:clrMapOvr>
@@ -4077,9 +5346,129 @@
         <p:nvPr/>
       </p:nvGrpSpPr>
       <p:grpSpPr/>
-      <p:sp>
-        <p:nvSpPr>
-          <p:cNvPr id="2" name="Rectangle 1"/>
+      <p:pic>
+        <p:nvPicPr>
+          <p:cNvPr id="2" name="Picture 1" descr="image47.jpg"/>
+          <p:cNvPicPr>
+            <a:picLocks noChangeAspect="1"/>
+          </p:cNvPicPr>
+          <p:nvPr/>
+        </p:nvPicPr>
+        <p:blipFill>
+          <a:blip r:embed="rId2"/>
+          <a:stretch>
+            <a:fillRect/>
+          </a:stretch>
+        </p:blipFill>
+        <p:spPr>
+          <a:xfrm>
+            <a:off x="332664" y="3630171"/>
+            <a:ext cx="3793089" cy="3057620"/>
+          </a:xfrm>
+          <a:prstGeom prst="rect">
+            <a:avLst/>
+          </a:prstGeom>
+        </p:spPr>
+      </p:pic>
+      <p:pic>
+        <p:nvPicPr>
+          <p:cNvPr id="3" name="Picture 2" descr="image48.jpg"/>
+          <p:cNvPicPr>
+            <a:picLocks noChangeAspect="1"/>
+          </p:cNvPicPr>
+          <p:nvPr/>
+        </p:nvPicPr>
+        <p:blipFill>
+          <a:blip r:embed="rId3"/>
+          <a:stretch>
+            <a:fillRect/>
+          </a:stretch>
+        </p:blipFill>
+        <p:spPr>
+          <a:xfrm>
+            <a:off x="4069534" y="3651161"/>
+            <a:ext cx="5139609" cy="3036629"/>
+          </a:xfrm>
+          <a:prstGeom prst="rect">
+            <a:avLst/>
+          </a:prstGeom>
+        </p:spPr>
+      </p:pic>
+      <p:pic>
+        <p:nvPicPr>
+          <p:cNvPr id="4" name="Picture 3" descr="image49.jpg"/>
+          <p:cNvPicPr>
+            <a:picLocks noChangeAspect="1"/>
+          </p:cNvPicPr>
+          <p:nvPr/>
+        </p:nvPicPr>
+        <p:blipFill>
+          <a:blip r:embed="rId4"/>
+          <a:stretch>
+            <a:fillRect/>
+          </a:stretch>
+        </p:blipFill>
+        <p:spPr>
+          <a:xfrm>
+            <a:off x="5943600" y="5703611"/>
+            <a:ext cx="2821981" cy="1009072"/>
+          </a:xfrm>
+          <a:prstGeom prst="rect">
+            <a:avLst/>
+          </a:prstGeom>
+        </p:spPr>
+      </p:pic>
+      <p:pic>
+        <p:nvPicPr>
+          <p:cNvPr id="5" name="Picture 4" descr="image50.jpg"/>
+          <p:cNvPicPr>
+            <a:picLocks noChangeAspect="1"/>
+          </p:cNvPicPr>
+          <p:nvPr/>
+        </p:nvPicPr>
+        <p:blipFill>
+          <a:blip r:embed="rId5"/>
+          <a:stretch>
+            <a:fillRect/>
+          </a:stretch>
+        </p:blipFill>
+        <p:spPr>
+          <a:xfrm>
+            <a:off x="3031679" y="5705850"/>
+            <a:ext cx="2750327" cy="1009073"/>
+          </a:xfrm>
+          <a:prstGeom prst="rect">
+            <a:avLst/>
+          </a:prstGeom>
+        </p:spPr>
+      </p:pic>
+      <p:pic>
+        <p:nvPicPr>
+          <p:cNvPr id="6" name="Picture 5" descr="image51.jpg"/>
+          <p:cNvPicPr>
+            <a:picLocks noChangeAspect="1"/>
+          </p:cNvPicPr>
+          <p:nvPr/>
+        </p:nvPicPr>
+        <p:blipFill>
+          <a:blip r:embed="rId6"/>
+          <a:stretch>
+            <a:fillRect/>
+          </a:stretch>
+        </p:blipFill>
+        <p:spPr>
+          <a:xfrm>
+            <a:off x="191759" y="5703612"/>
+            <a:ext cx="2678327" cy="1011312"/>
+          </a:xfrm>
+          <a:prstGeom prst="rect">
+            <a:avLst/>
+          </a:prstGeom>
+        </p:spPr>
+      </p:pic>
+      <p:sp>
+        <p:nvSpPr>
+          <p:cNvPr id="7" name="Rectangle 6"/>
           <p:cNvSpPr/>
           <p:nvPr/>
         </p:nvSpPr>
@@ -4118,7 +5507,7 @@
       </p:sp>
       <p:sp>
         <p:nvSpPr>
-          <p:cNvPr id="3" name="Rectangle 2"/>
+          <p:cNvPr id="8" name="Rectangle 7"/>
           <p:cNvSpPr/>
           <p:nvPr/>
         </p:nvSpPr>
@@ -4155,6 +5544,126 @@
           </a:p>
         </p:txBody>
       </p:sp>
+      <p:pic>
+        <p:nvPicPr>
+          <p:cNvPr id="9" name="Picture 8" descr="image52.jpg"/>
+          <p:cNvPicPr>
+            <a:picLocks noChangeAspect="1"/>
+          </p:cNvPicPr>
+          <p:nvPr/>
+        </p:nvPicPr>
+        <p:blipFill>
+          <a:blip r:embed="rId7"/>
+          <a:stretch>
+            <a:fillRect/>
+          </a:stretch>
+        </p:blipFill>
+        <p:spPr>
+          <a:xfrm>
+            <a:off x="2443544" y="4310554"/>
+            <a:ext cx="3238897" cy="2395046"/>
+          </a:xfrm>
+          <a:prstGeom prst="rect">
+            <a:avLst/>
+          </a:prstGeom>
+        </p:spPr>
+      </p:pic>
+      <p:pic>
+        <p:nvPicPr>
+          <p:cNvPr id="10" name="Picture 9" descr="image53.jpg"/>
+          <p:cNvPicPr>
+            <a:picLocks noChangeAspect="1"/>
+          </p:cNvPicPr>
+          <p:nvPr/>
+        </p:nvPicPr>
+        <p:blipFill>
+          <a:blip r:embed="rId8"/>
+          <a:stretch>
+            <a:fillRect/>
+          </a:stretch>
+        </p:blipFill>
+        <p:spPr>
+          <a:xfrm>
+            <a:off x="5654162" y="4279554"/>
+            <a:ext cx="3238897" cy="2426046"/>
+          </a:xfrm>
+          <a:prstGeom prst="rect">
+            <a:avLst/>
+          </a:prstGeom>
+        </p:spPr>
+      </p:pic>
+      <p:pic>
+        <p:nvPicPr>
+          <p:cNvPr id="11" name="Picture 10" descr="image54.jpg"/>
+          <p:cNvPicPr>
+            <a:picLocks noChangeAspect="1"/>
+          </p:cNvPicPr>
+          <p:nvPr/>
+        </p:nvPicPr>
+        <p:blipFill>
+          <a:blip r:embed="rId9"/>
+          <a:stretch>
+            <a:fillRect/>
+          </a:stretch>
+        </p:blipFill>
+        <p:spPr>
+          <a:xfrm>
+            <a:off x="5654161" y="2165000"/>
+            <a:ext cx="3238897" cy="2155339"/>
+          </a:xfrm>
+          <a:prstGeom prst="rect">
+            <a:avLst/>
+          </a:prstGeom>
+        </p:spPr>
+      </p:pic>
+      <p:pic>
+        <p:nvPicPr>
+          <p:cNvPr id="12" name="Picture 11" descr="image55.jpg"/>
+          <p:cNvPicPr>
+            <a:picLocks noChangeAspect="1"/>
+          </p:cNvPicPr>
+          <p:nvPr/>
+        </p:nvPicPr>
+        <p:blipFill>
+          <a:blip r:embed="rId10"/>
+          <a:stretch>
+            <a:fillRect/>
+          </a:stretch>
+        </p:blipFill>
+        <p:spPr>
+          <a:xfrm>
+            <a:off x="2559821" y="2852637"/>
+            <a:ext cx="3114675" cy="1466850"/>
+          </a:xfrm>
+          <a:prstGeom prst="rect">
+            <a:avLst/>
+          </a:prstGeom>
+        </p:spPr>
+      </p:pic>
+      <p:pic>
+        <p:nvPicPr>
+          <p:cNvPr id="13" name="Picture 12" descr="image56.jpg"/>
+          <p:cNvPicPr>
+            <a:picLocks noChangeAspect="1"/>
+          </p:cNvPicPr>
+          <p:nvPr/>
+        </p:nvPicPr>
+        <p:blipFill>
+          <a:blip r:embed="rId11"/>
+          <a:stretch>
+            <a:fillRect/>
+          </a:stretch>
+        </p:blipFill>
+        <p:spPr>
+          <a:xfrm>
+            <a:off x="217954" y="4261645"/>
+            <a:ext cx="2362200" cy="2403979"/>
+          </a:xfrm>
+          <a:prstGeom prst="rect">
+            <a:avLst/>
+          </a:prstGeom>
+        </p:spPr>
+      </p:pic>
     </p:spTree>
   </p:cSld>
   <p:clrMapOvr>
@@ -4173,9 +5682,225 @@
         <p:nvPr/>
       </p:nvGrpSpPr>
       <p:grpSpPr/>
-      <p:sp>
-        <p:nvSpPr>
-          <p:cNvPr id="2" name="Rectangle 1"/>
+      <p:pic>
+        <p:nvPicPr>
+          <p:cNvPr id="2" name="Picture 1" descr="image57.jpg"/>
+          <p:cNvPicPr>
+            <a:picLocks noChangeAspect="1"/>
+          </p:cNvPicPr>
+          <p:nvPr/>
+        </p:nvPicPr>
+        <p:blipFill>
+          <a:blip r:embed="rId2"/>
+          <a:stretch>
+            <a:fillRect/>
+          </a:stretch>
+        </p:blipFill>
+        <p:spPr>
+          <a:xfrm>
+            <a:off x="304799" y="4344218"/>
+            <a:ext cx="3214995" cy="2319187"/>
+          </a:xfrm>
+          <a:prstGeom prst="rect">
+            <a:avLst/>
+          </a:prstGeom>
+        </p:spPr>
+      </p:pic>
+      <p:pic>
+        <p:nvPicPr>
+          <p:cNvPr id="3" name="Picture 2" descr="image58.jpg"/>
+          <p:cNvPicPr>
+            <a:picLocks noChangeAspect="1"/>
+          </p:cNvPicPr>
+          <p:nvPr/>
+        </p:nvPicPr>
+        <p:blipFill>
+          <a:blip r:embed="rId3"/>
+          <a:stretch>
+            <a:fillRect/>
+          </a:stretch>
+        </p:blipFill>
+        <p:spPr>
+          <a:xfrm>
+            <a:off x="3276600" y="4344219"/>
+            <a:ext cx="5861487" cy="2351218"/>
+          </a:xfrm>
+          <a:prstGeom prst="rect">
+            <a:avLst/>
+          </a:prstGeom>
+        </p:spPr>
+      </p:pic>
+      <p:pic>
+        <p:nvPicPr>
+          <p:cNvPr id="4" name="Picture 3" descr="image59.jpg"/>
+          <p:cNvPicPr>
+            <a:picLocks noChangeAspect="1"/>
+          </p:cNvPicPr>
+          <p:nvPr/>
+        </p:nvPicPr>
+        <p:blipFill>
+          <a:blip r:embed="rId4"/>
+          <a:stretch>
+            <a:fillRect/>
+          </a:stretch>
+        </p:blipFill>
+        <p:spPr>
+          <a:xfrm>
+            <a:off x="101148" y="4452770"/>
+            <a:ext cx="3274230" cy="2178851"/>
+          </a:xfrm>
+          <a:prstGeom prst="rect">
+            <a:avLst/>
+          </a:prstGeom>
+        </p:spPr>
+      </p:pic>
+      <p:pic>
+        <p:nvPicPr>
+          <p:cNvPr id="5" name="Picture 4" descr="image60.jpg"/>
+          <p:cNvPicPr>
+            <a:picLocks noChangeAspect="1"/>
+          </p:cNvPicPr>
+          <p:nvPr/>
+        </p:nvPicPr>
+        <p:blipFill>
+          <a:blip r:embed="rId5"/>
+          <a:stretch>
+            <a:fillRect/>
+          </a:stretch>
+        </p:blipFill>
+        <p:spPr>
+          <a:xfrm>
+            <a:off x="7847647" y="4900665"/>
+            <a:ext cx="1169136" cy="1716173"/>
+          </a:xfrm>
+          <a:prstGeom prst="rect">
+            <a:avLst/>
+          </a:prstGeom>
+        </p:spPr>
+      </p:pic>
+      <p:pic>
+        <p:nvPicPr>
+          <p:cNvPr id="6" name="Picture 5" descr="image61.jpg"/>
+          <p:cNvPicPr>
+            <a:picLocks noChangeAspect="1"/>
+          </p:cNvPicPr>
+          <p:nvPr/>
+        </p:nvPicPr>
+        <p:blipFill>
+          <a:blip r:embed="rId6"/>
+          <a:stretch>
+            <a:fillRect/>
+          </a:stretch>
+        </p:blipFill>
+        <p:spPr>
+          <a:xfrm>
+            <a:off x="3263335" y="2606479"/>
+            <a:ext cx="3189322" cy="4054766"/>
+          </a:xfrm>
+          <a:prstGeom prst="rect">
+            <a:avLst/>
+          </a:prstGeom>
+        </p:spPr>
+      </p:pic>
+      <p:pic>
+        <p:nvPicPr>
+          <p:cNvPr id="7" name="Picture 6" descr="image62.jpg"/>
+          <p:cNvPicPr>
+            <a:picLocks noChangeAspect="1"/>
+          </p:cNvPicPr>
+          <p:nvPr/>
+        </p:nvPicPr>
+        <p:blipFill>
+          <a:blip r:embed="rId7"/>
+          <a:stretch>
+            <a:fillRect/>
+          </a:stretch>
+        </p:blipFill>
+        <p:spPr>
+          <a:xfrm>
+            <a:off x="6327161" y="3424567"/>
+            <a:ext cx="2689332" cy="1511062"/>
+          </a:xfrm>
+          <a:prstGeom prst="rect">
+            <a:avLst/>
+          </a:prstGeom>
+        </p:spPr>
+      </p:pic>
+      <p:pic>
+        <p:nvPicPr>
+          <p:cNvPr id="8" name="Picture 7" descr="image63.jpg"/>
+          <p:cNvPicPr>
+            <a:picLocks noChangeAspect="1"/>
+          </p:cNvPicPr>
+          <p:nvPr/>
+        </p:nvPicPr>
+        <p:blipFill>
+          <a:blip r:embed="rId8"/>
+          <a:stretch>
+            <a:fillRect/>
+          </a:stretch>
+        </p:blipFill>
+        <p:spPr>
+          <a:xfrm>
+            <a:off x="151067" y="2310570"/>
+            <a:ext cx="2962323" cy="2123930"/>
+          </a:xfrm>
+          <a:prstGeom prst="rect">
+            <a:avLst/>
+          </a:prstGeom>
+        </p:spPr>
+      </p:pic>
+      <p:pic>
+        <p:nvPicPr>
+          <p:cNvPr id="9" name="Picture 8" descr="image64.jpg"/>
+          <p:cNvPicPr>
+            <a:picLocks noChangeAspect="1"/>
+          </p:cNvPicPr>
+          <p:nvPr/>
+        </p:nvPicPr>
+        <p:blipFill>
+          <a:blip r:embed="rId9"/>
+          <a:stretch>
+            <a:fillRect/>
+          </a:stretch>
+        </p:blipFill>
+        <p:spPr>
+          <a:xfrm>
+            <a:off x="6327161" y="2291407"/>
+            <a:ext cx="2009652" cy="1125405"/>
+          </a:xfrm>
+          <a:prstGeom prst="rect">
+            <a:avLst/>
+          </a:prstGeom>
+        </p:spPr>
+      </p:pic>
+      <p:pic>
+        <p:nvPicPr>
+          <p:cNvPr id="10" name="Picture 9" descr="image65.jpg"/>
+          <p:cNvPicPr>
+            <a:picLocks noChangeAspect="1"/>
+          </p:cNvPicPr>
+          <p:nvPr/>
+        </p:nvPicPr>
+        <p:blipFill>
+          <a:blip r:embed="rId10"/>
+          <a:stretch>
+            <a:fillRect/>
+          </a:stretch>
+        </p:blipFill>
+        <p:spPr>
+          <a:xfrm>
+            <a:off x="6354294" y="5005647"/>
+            <a:ext cx="1412566" cy="1673454"/>
+          </a:xfrm>
+          <a:prstGeom prst="rect">
+            <a:avLst/>
+          </a:prstGeom>
+        </p:spPr>
+      </p:pic>
+      <p:sp>
+        <p:nvSpPr>
+          <p:cNvPr id="11" name="Rectangle 10"/>
           <p:cNvSpPr/>
           <p:nvPr/>
         </p:nvSpPr>
@@ -4214,7 +5939,7 @@
       </p:sp>
       <p:sp>
         <p:nvSpPr>
-          <p:cNvPr id="3" name="Rectangle 2"/>
+          <p:cNvPr id="12" name="Rectangle 11"/>
           <p:cNvSpPr/>
           <p:nvPr/>
         </p:nvSpPr>
@@ -4253,7 +5978,7 @@
       </p:sp>
       <p:sp>
         <p:nvSpPr>
-          <p:cNvPr id="4" name="Rectangle 3"/>
+          <p:cNvPr id="13" name="Rectangle 12"/>
           <p:cNvSpPr/>
           <p:nvPr/>
         </p:nvSpPr>
@@ -4292,7 +6017,7 @@
       </p:sp>
       <p:sp>
         <p:nvSpPr>
-          <p:cNvPr id="5" name="Rectangle 4"/>
+          <p:cNvPr id="14" name="Rectangle 13"/>
           <p:cNvSpPr/>
           <p:nvPr/>
         </p:nvSpPr>
@@ -4329,6 +6054,102 @@
           </a:p>
         </p:txBody>
       </p:sp>
+      <p:pic>
+        <p:nvPicPr>
+          <p:cNvPr id="15" name="Picture 14" descr="image66.jpg"/>
+          <p:cNvPicPr>
+            <a:picLocks noChangeAspect="1"/>
+          </p:cNvPicPr>
+          <p:nvPr/>
+        </p:nvPicPr>
+        <p:blipFill>
+          <a:blip r:embed="rId11"/>
+          <a:stretch>
+            <a:fillRect/>
+          </a:stretch>
+        </p:blipFill>
+        <p:spPr>
+          <a:xfrm>
+            <a:off x="2233057" y="4773859"/>
+            <a:ext cx="3178373" cy="1889548"/>
+          </a:xfrm>
+          <a:prstGeom prst="rect">
+            <a:avLst/>
+          </a:prstGeom>
+        </p:spPr>
+      </p:pic>
+      <p:pic>
+        <p:nvPicPr>
+          <p:cNvPr id="16" name="Picture 15" descr="image67.jpg"/>
+          <p:cNvPicPr>
+            <a:picLocks noChangeAspect="1"/>
+          </p:cNvPicPr>
+          <p:nvPr/>
+        </p:nvPicPr>
+        <p:blipFill>
+          <a:blip r:embed="rId12"/>
+          <a:stretch>
+            <a:fillRect/>
+          </a:stretch>
+        </p:blipFill>
+        <p:spPr>
+          <a:xfrm>
+            <a:off x="5426952" y="4313236"/>
+            <a:ext cx="3478094" cy="2314513"/>
+          </a:xfrm>
+          <a:prstGeom prst="rect">
+            <a:avLst/>
+          </a:prstGeom>
+        </p:spPr>
+      </p:pic>
+      <p:pic>
+        <p:nvPicPr>
+          <p:cNvPr id="17" name="Picture 16" descr="image68.jpg"/>
+          <p:cNvPicPr>
+            <a:picLocks noChangeAspect="1"/>
+          </p:cNvPicPr>
+          <p:nvPr/>
+        </p:nvPicPr>
+        <p:blipFill>
+          <a:blip r:embed="rId13"/>
+          <a:stretch>
+            <a:fillRect/>
+          </a:stretch>
+        </p:blipFill>
+        <p:spPr>
+          <a:xfrm>
+            <a:off x="2259956" y="2592392"/>
+            <a:ext cx="3178373" cy="2181466"/>
+          </a:xfrm>
+          <a:prstGeom prst="rect">
+            <a:avLst/>
+          </a:prstGeom>
+        </p:spPr>
+      </p:pic>
+      <p:pic>
+        <p:nvPicPr>
+          <p:cNvPr id="18" name="Picture 17" descr="image69.jpg"/>
+          <p:cNvPicPr>
+            <a:picLocks noChangeAspect="1"/>
+          </p:cNvPicPr>
+          <p:nvPr/>
+        </p:nvPicPr>
+        <p:blipFill>
+          <a:blip r:embed="rId14"/>
+          <a:stretch>
+            <a:fillRect/>
+          </a:stretch>
+        </p:blipFill>
+        <p:spPr>
+          <a:xfrm>
+            <a:off x="5433839" y="2961473"/>
+            <a:ext cx="3467653" cy="1387061"/>
+          </a:xfrm>
+          <a:prstGeom prst="rect">
+            <a:avLst/>
+          </a:prstGeom>
+        </p:spPr>
+      </p:pic>
     </p:spTree>
   </p:cSld>
   <p:clrMapOvr>

--- a/examples/recreations/13_Dropbox_Education__Engineering_CareerOverview_SHS_DMCoombs_20210407_r/out_mat2ppt.pptx
+++ b/examples/recreations/13_Dropbox_Education__Engineering_CareerOverview_SHS_DMCoombs_20210407_r/out_mat2ppt.pptx
@@ -3098,9 +3098,129 @@
         <p:nvPr/>
       </p:nvGrpSpPr>
       <p:grpSpPr/>
-      <p:sp>
-        <p:nvSpPr>
-          <p:cNvPr id="2" name="Rectangle 1"/>
+      <p:pic>
+        <p:nvPicPr>
+          <p:cNvPr id="2" name="Picture 1" descr="image1.png"/>
+          <p:cNvPicPr>
+            <a:picLocks noChangeAspect="1"/>
+          </p:cNvPicPr>
+          <p:nvPr/>
+        </p:nvPicPr>
+        <p:blipFill>
+          <a:blip r:embed="rId2"/>
+          <a:stretch>
+            <a:fillRect/>
+          </a:stretch>
+        </p:blipFill>
+        <p:spPr>
+          <a:xfrm>
+            <a:off x="8153400" y="489810"/>
+            <a:ext cx="990600" cy="169863"/>
+          </a:xfrm>
+          <a:prstGeom prst="rect">
+            <a:avLst/>
+          </a:prstGeom>
+        </p:spPr>
+      </p:pic>
+      <p:pic>
+        <p:nvPicPr>
+          <p:cNvPr id="3" name="Picture 2" descr="image2.png"/>
+          <p:cNvPicPr>
+            <a:picLocks noChangeAspect="1"/>
+          </p:cNvPicPr>
+          <p:nvPr/>
+        </p:nvPicPr>
+        <p:blipFill>
+          <a:blip r:embed="rId3"/>
+          <a:stretch>
+            <a:fillRect/>
+          </a:stretch>
+        </p:blipFill>
+        <p:spPr>
+          <a:xfrm>
+            <a:off x="8151813" y="226277"/>
+            <a:ext cx="976267" cy="230923"/>
+          </a:xfrm>
+          <a:prstGeom prst="rect">
+            <a:avLst/>
+          </a:prstGeom>
+        </p:spPr>
+      </p:pic>
+      <p:pic>
+        <p:nvPicPr>
+          <p:cNvPr id="4" name="Picture 3" descr="image3.png"/>
+          <p:cNvPicPr>
+            <a:picLocks noChangeAspect="1"/>
+          </p:cNvPicPr>
+          <p:nvPr/>
+        </p:nvPicPr>
+        <p:blipFill>
+          <a:blip r:embed="rId4"/>
+          <a:stretch>
+            <a:fillRect/>
+          </a:stretch>
+        </p:blipFill>
+        <p:spPr>
+          <a:xfrm>
+            <a:off x="8189153" y="702855"/>
+            <a:ext cx="801654" cy="320662"/>
+          </a:xfrm>
+          <a:prstGeom prst="rect">
+            <a:avLst/>
+          </a:prstGeom>
+        </p:spPr>
+      </p:pic>
+      <p:pic>
+        <p:nvPicPr>
+          <p:cNvPr id="5" name="Picture 4" descr="image4.png"/>
+          <p:cNvPicPr>
+            <a:picLocks noChangeAspect="1"/>
+          </p:cNvPicPr>
+          <p:nvPr/>
+        </p:nvPicPr>
+        <p:blipFill>
+          <a:blip r:embed="rId5"/>
+          <a:stretch>
+            <a:fillRect/>
+          </a:stretch>
+        </p:blipFill>
+        <p:spPr>
+          <a:xfrm>
+            <a:off x="-3765" y="533400"/>
+            <a:ext cx="992778" cy="430788"/>
+          </a:xfrm>
+          <a:prstGeom prst="rect">
+            <a:avLst/>
+          </a:prstGeom>
+        </p:spPr>
+      </p:pic>
+      <p:pic>
+        <p:nvPicPr>
+          <p:cNvPr id="6" name="Picture 5" descr="image5.png"/>
+          <p:cNvPicPr>
+            <a:picLocks noChangeAspect="1"/>
+          </p:cNvPicPr>
+          <p:nvPr/>
+        </p:nvPicPr>
+        <p:blipFill>
+          <a:blip r:embed="rId6"/>
+          <a:stretch>
+            <a:fillRect/>
+          </a:stretch>
+        </p:blipFill>
+        <p:spPr>
+          <a:xfrm>
+            <a:off x="35099" y="152400"/>
+            <a:ext cx="953914" cy="294846"/>
+          </a:xfrm>
+          <a:prstGeom prst="rect">
+            <a:avLst/>
+          </a:prstGeom>
+        </p:spPr>
+      </p:pic>
+      <p:sp>
+        <p:nvSpPr>
+          <p:cNvPr id="7" name="Rectangle 6"/>
           <p:cNvSpPr/>
           <p:nvPr/>
         </p:nvSpPr>
@@ -3137,7 +3257,7 @@
       </p:sp>
       <p:sp>
         <p:nvSpPr>
-          <p:cNvPr id="3" name="Rectangle 2"/>
+          <p:cNvPr id="8" name="Rectangle 7"/>
           <p:cNvSpPr/>
           <p:nvPr/>
         </p:nvSpPr>
@@ -3176,7 +3296,7 @@
       </p:sp>
       <p:sp>
         <p:nvSpPr>
-          <p:cNvPr id="4" name="Rectangle 3"/>
+          <p:cNvPr id="9" name="Rectangle 8"/>
           <p:cNvSpPr/>
           <p:nvPr/>
         </p:nvSpPr>
